--- a/livro_ia_educacao/saida/pptx/Cap28_slides.pptx
+++ b/livro_ia_educacao/saida/pptx/Cap28_slides.pptx
@@ -9927,11 +9927,11 @@
         <p:spPr>
           <a:xfrm>
             <a:off x="548640" y="1417320"/>
-            <a:ext cx="11064240" cy="762000"/>
+            <a:ext cx="11064240" cy="682752"/>
           </a:xfrm>
           <a:prstGeom prst="roundRect">
             <a:avLst>
-              <a:gd name="adj" fmla="val 14400"/>
+              <a:gd name="adj" fmla="val 16071"/>
             </a:avLst>
           </a:prstGeom>
           <a:solidFill>
@@ -9958,7 +9958,7 @@
         <p:spPr>
           <a:xfrm>
             <a:off x="731520" y="1417320"/>
-            <a:ext cx="548640" cy="762000"/>
+            <a:ext cx="548640" cy="682752"/>
           </a:xfrm>
           <a:prstGeom prst="rect">
             <a:avLst/>
@@ -9994,7 +9994,7 @@
         <p:spPr>
           <a:xfrm>
             <a:off x="1463040" y="1417320"/>
-            <a:ext cx="9966960" cy="762000"/>
+            <a:ext cx="9966960" cy="682752"/>
           </a:xfrm>
           <a:prstGeom prst="rect">
             <a:avLst/>
@@ -10029,12 +10029,12 @@
         </p:nvSpPr>
         <p:spPr>
           <a:xfrm>
-            <a:off x="548640" y="2289048"/>
-            <a:ext cx="11064240" cy="762000"/>
+            <a:off x="548640" y="2209800"/>
+            <a:ext cx="11064240" cy="682752"/>
           </a:xfrm>
           <a:prstGeom prst="roundRect">
             <a:avLst>
-              <a:gd name="adj" fmla="val 14400"/>
+              <a:gd name="adj" fmla="val 16071"/>
             </a:avLst>
           </a:prstGeom>
           <a:solidFill>
@@ -10060,8 +10060,8 @@
         </p:nvSpPr>
         <p:spPr>
           <a:xfrm>
-            <a:off x="731520" y="2289048"/>
-            <a:ext cx="548640" cy="762000"/>
+            <a:off x="731520" y="2209800"/>
+            <a:ext cx="548640" cy="682752"/>
           </a:xfrm>
           <a:prstGeom prst="rect">
             <a:avLst/>
@@ -10096,8 +10096,8 @@
         </p:nvSpPr>
         <p:spPr>
           <a:xfrm>
-            <a:off x="1463040" y="2289048"/>
-            <a:ext cx="9966960" cy="762000"/>
+            <a:off x="1463040" y="2209800"/>
+            <a:ext cx="9966960" cy="682752"/>
           </a:xfrm>
           <a:prstGeom prst="rect">
             <a:avLst/>
@@ -10132,12 +10132,12 @@
         </p:nvSpPr>
         <p:spPr>
           <a:xfrm>
-            <a:off x="548640" y="3160776"/>
-            <a:ext cx="11064240" cy="762000"/>
+            <a:off x="548640" y="3002280"/>
+            <a:ext cx="11064240" cy="682752"/>
           </a:xfrm>
           <a:prstGeom prst="roundRect">
             <a:avLst>
-              <a:gd name="adj" fmla="val 14400"/>
+              <a:gd name="adj" fmla="val 16071"/>
             </a:avLst>
           </a:prstGeom>
           <a:solidFill>
@@ -10163,8 +10163,8 @@
         </p:nvSpPr>
         <p:spPr>
           <a:xfrm>
-            <a:off x="731520" y="3160776"/>
-            <a:ext cx="548640" cy="762000"/>
+            <a:off x="731520" y="3002280"/>
+            <a:ext cx="548640" cy="682752"/>
           </a:xfrm>
           <a:prstGeom prst="rect">
             <a:avLst/>
@@ -10199,8 +10199,8 @@
         </p:nvSpPr>
         <p:spPr>
           <a:xfrm>
-            <a:off x="1463040" y="3160776"/>
-            <a:ext cx="9966960" cy="762000"/>
+            <a:off x="1463040" y="3002280"/>
+            <a:ext cx="9966960" cy="682752"/>
           </a:xfrm>
           <a:prstGeom prst="rect">
             <a:avLst/>
@@ -10235,12 +10235,12 @@
         </p:nvSpPr>
         <p:spPr>
           <a:xfrm>
-            <a:off x="548640" y="4032504"/>
-            <a:ext cx="11064240" cy="762000"/>
+            <a:off x="548640" y="3794760"/>
+            <a:ext cx="11064240" cy="682752"/>
           </a:xfrm>
           <a:prstGeom prst="roundRect">
             <a:avLst>
-              <a:gd name="adj" fmla="val 14400"/>
+              <a:gd name="adj" fmla="val 16071"/>
             </a:avLst>
           </a:prstGeom>
           <a:solidFill>
@@ -10266,8 +10266,8 @@
         </p:nvSpPr>
         <p:spPr>
           <a:xfrm>
-            <a:off x="731520" y="4032504"/>
-            <a:ext cx="548640" cy="762000"/>
+            <a:off x="731520" y="3794760"/>
+            <a:ext cx="548640" cy="682752"/>
           </a:xfrm>
           <a:prstGeom prst="rect">
             <a:avLst/>
@@ -10302,8 +10302,8 @@
         </p:nvSpPr>
         <p:spPr>
           <a:xfrm>
-            <a:off x="1463040" y="4032504"/>
-            <a:ext cx="9966960" cy="762000"/>
+            <a:off x="1463040" y="3794760"/>
+            <a:ext cx="9966960" cy="682752"/>
           </a:xfrm>
           <a:prstGeom prst="rect">
             <a:avLst/>
@@ -10338,12 +10338,12 @@
         </p:nvSpPr>
         <p:spPr>
           <a:xfrm>
-            <a:off x="548640" y="4904232"/>
-            <a:ext cx="11064240" cy="762000"/>
+            <a:off x="548640" y="4587240"/>
+            <a:ext cx="11064240" cy="682752"/>
           </a:xfrm>
           <a:prstGeom prst="roundRect">
             <a:avLst>
-              <a:gd name="adj" fmla="val 14400"/>
+              <a:gd name="adj" fmla="val 16071"/>
             </a:avLst>
           </a:prstGeom>
           <a:solidFill>
@@ -10369,8 +10369,8 @@
         </p:nvSpPr>
         <p:spPr>
           <a:xfrm>
-            <a:off x="731520" y="4904232"/>
-            <a:ext cx="548640" cy="762000"/>
+            <a:off x="731520" y="4587240"/>
+            <a:ext cx="548640" cy="682752"/>
           </a:xfrm>
           <a:prstGeom prst="rect">
             <a:avLst/>
@@ -10405,8 +10405,8 @@
         </p:nvSpPr>
         <p:spPr>
           <a:xfrm>
-            <a:off x="1463040" y="4904232"/>
-            <a:ext cx="9966960" cy="762000"/>
+            <a:off x="1463040" y="4587240"/>
+            <a:ext cx="9966960" cy="682752"/>
           </a:xfrm>
           <a:prstGeom prst="rect">
             <a:avLst/>
@@ -10441,12 +10441,12 @@
         </p:nvSpPr>
         <p:spPr>
           <a:xfrm>
-            <a:off x="548640" y="5775960"/>
-            <a:ext cx="11064240" cy="762000"/>
+            <a:off x="548640" y="5379720"/>
+            <a:ext cx="11064240" cy="682752"/>
           </a:xfrm>
           <a:prstGeom prst="roundRect">
             <a:avLst>
-              <a:gd name="adj" fmla="val 14400"/>
+              <a:gd name="adj" fmla="val 16071"/>
             </a:avLst>
           </a:prstGeom>
           <a:solidFill>
@@ -10472,8 +10472,8 @@
         </p:nvSpPr>
         <p:spPr>
           <a:xfrm>
-            <a:off x="731520" y="5775960"/>
-            <a:ext cx="548640" cy="762000"/>
+            <a:off x="731520" y="5379720"/>
+            <a:ext cx="548640" cy="682752"/>
           </a:xfrm>
           <a:prstGeom prst="rect">
             <a:avLst/>
@@ -10508,8 +10508,8 @@
         </p:nvSpPr>
         <p:spPr>
           <a:xfrm>
-            <a:off x="1463040" y="5775960"/>
-            <a:ext cx="9966960" cy="762000"/>
+            <a:off x="1463040" y="5379720"/>
+            <a:ext cx="9966960" cy="682752"/>
           </a:xfrm>
           <a:prstGeom prst="rect">
             <a:avLst/>
